--- a/Презентация TickTask.pptx
+++ b/Презентация TickTask.pptx
@@ -1377,32 +1377,6 @@
           </a:solidFill>
         </p:spPr>
       </p:sp>
-      <p:pic>
-        <p:nvPicPr>
-          <p:cNvPr id="4" name="Image 0" descr="preencoded.png">
-            <a:hlinkClick r:id="rId2"/>
-          </p:cNvPr>
-          <p:cNvPicPr>
-            <a:picLocks noChangeAspect="1"/>
-          </p:cNvPicPr>
-          <p:nvPr/>
-        </p:nvPicPr>
-        <p:blipFill>
-          <a:blip r:embed="rId3"/>
-          <a:stretch>
-            <a:fillRect/>
-          </a:stretch>
-        </p:blipFill>
-        <p:spPr>
-          <a:xfrm>
-            <a:off x="12839215" y="7749540"/>
-            <a:ext cx="1722605" cy="411480"/>
-          </a:xfrm>
-          <a:prstGeom prst="rect">
-            <a:avLst/>
-          </a:prstGeom>
-        </p:spPr>
-      </p:pic>
     </p:spTree>
   </p:cSld>
   <p:clrMapOvr>
@@ -1466,32 +1440,6 @@
           </a:solidFill>
         </p:spPr>
       </p:sp>
-      <p:pic>
-        <p:nvPicPr>
-          <p:cNvPr id="4" name="Image 0" descr="preencoded.png">
-            <a:hlinkClick r:id="rId2"/>
-          </p:cNvPr>
-          <p:cNvPicPr>
-            <a:picLocks noChangeAspect="1"/>
-          </p:cNvPicPr>
-          <p:nvPr/>
-        </p:nvPicPr>
-        <p:blipFill>
-          <a:blip r:embed="rId3"/>
-          <a:stretch>
-            <a:fillRect/>
-          </a:stretch>
-        </p:blipFill>
-        <p:spPr>
-          <a:xfrm>
-            <a:off x="12839215" y="7749540"/>
-            <a:ext cx="1722605" cy="411480"/>
-          </a:xfrm>
-          <a:prstGeom prst="rect">
-            <a:avLst/>
-          </a:prstGeom>
-        </p:spPr>
-      </p:pic>
     </p:spTree>
   </p:cSld>
   <p:clrMapOvr>
@@ -1555,32 +1503,6 @@
           </a:solidFill>
         </p:spPr>
       </p:sp>
-      <p:pic>
-        <p:nvPicPr>
-          <p:cNvPr id="4" name="Image 0" descr="preencoded.png">
-            <a:hlinkClick r:id="rId2"/>
-          </p:cNvPr>
-          <p:cNvPicPr>
-            <a:picLocks noChangeAspect="1"/>
-          </p:cNvPicPr>
-          <p:nvPr/>
-        </p:nvPicPr>
-        <p:blipFill>
-          <a:blip r:embed="rId3"/>
-          <a:stretch>
-            <a:fillRect/>
-          </a:stretch>
-        </p:blipFill>
-        <p:spPr>
-          <a:xfrm>
-            <a:off x="12839215" y="7749540"/>
-            <a:ext cx="1722605" cy="411480"/>
-          </a:xfrm>
-          <a:prstGeom prst="rect">
-            <a:avLst/>
-          </a:prstGeom>
-        </p:spPr>
-      </p:pic>
     </p:spTree>
   </p:cSld>
   <p:clrMapOvr>
@@ -1644,32 +1566,6 @@
           </a:solidFill>
         </p:spPr>
       </p:sp>
-      <p:pic>
-        <p:nvPicPr>
-          <p:cNvPr id="4" name="Image 0" descr="preencoded.png">
-            <a:hlinkClick r:id="rId2"/>
-          </p:cNvPr>
-          <p:cNvPicPr>
-            <a:picLocks noChangeAspect="1"/>
-          </p:cNvPicPr>
-          <p:nvPr/>
-        </p:nvPicPr>
-        <p:blipFill>
-          <a:blip r:embed="rId3"/>
-          <a:stretch>
-            <a:fillRect/>
-          </a:stretch>
-        </p:blipFill>
-        <p:spPr>
-          <a:xfrm>
-            <a:off x="12839215" y="7749540"/>
-            <a:ext cx="1722605" cy="411480"/>
-          </a:xfrm>
-          <a:prstGeom prst="rect">
-            <a:avLst/>
-          </a:prstGeom>
-        </p:spPr>
-      </p:pic>
     </p:spTree>
   </p:cSld>
   <p:clrMapOvr>
@@ -1733,32 +1629,6 @@
           </a:solidFill>
         </p:spPr>
       </p:sp>
-      <p:pic>
-        <p:nvPicPr>
-          <p:cNvPr id="4" name="Image 0" descr="preencoded.png">
-            <a:hlinkClick r:id="rId2"/>
-          </p:cNvPr>
-          <p:cNvPicPr>
-            <a:picLocks noChangeAspect="1"/>
-          </p:cNvPicPr>
-          <p:nvPr/>
-        </p:nvPicPr>
-        <p:blipFill>
-          <a:blip r:embed="rId3"/>
-          <a:stretch>
-            <a:fillRect/>
-          </a:stretch>
-        </p:blipFill>
-        <p:spPr>
-          <a:xfrm>
-            <a:off x="12839215" y="7749540"/>
-            <a:ext cx="1722605" cy="411480"/>
-          </a:xfrm>
-          <a:prstGeom prst="rect">
-            <a:avLst/>
-          </a:prstGeom>
-        </p:spPr>
-      </p:pic>
     </p:spTree>
   </p:cSld>
   <p:clrMapOvr>
@@ -1822,32 +1692,6 @@
           </a:solidFill>
         </p:spPr>
       </p:sp>
-      <p:pic>
-        <p:nvPicPr>
-          <p:cNvPr id="4" name="Image 0" descr="preencoded.png">
-            <a:hlinkClick r:id="rId2"/>
-          </p:cNvPr>
-          <p:cNvPicPr>
-            <a:picLocks noChangeAspect="1"/>
-          </p:cNvPicPr>
-          <p:nvPr/>
-        </p:nvPicPr>
-        <p:blipFill>
-          <a:blip r:embed="rId3"/>
-          <a:stretch>
-            <a:fillRect/>
-          </a:stretch>
-        </p:blipFill>
-        <p:spPr>
-          <a:xfrm>
-            <a:off x="12839215" y="7749540"/>
-            <a:ext cx="1722605" cy="411480"/>
-          </a:xfrm>
-          <a:prstGeom prst="rect">
-            <a:avLst/>
-          </a:prstGeom>
-        </p:spPr>
-      </p:pic>
     </p:spTree>
   </p:cSld>
   <p:clrMapOvr>
@@ -1911,32 +1755,6 @@
           </a:solidFill>
         </p:spPr>
       </p:sp>
-      <p:pic>
-        <p:nvPicPr>
-          <p:cNvPr id="4" name="Image 0" descr="preencoded.png">
-            <a:hlinkClick r:id="rId2"/>
-          </p:cNvPr>
-          <p:cNvPicPr>
-            <a:picLocks noChangeAspect="1"/>
-          </p:cNvPicPr>
-          <p:nvPr/>
-        </p:nvPicPr>
-        <p:blipFill>
-          <a:blip r:embed="rId3"/>
-          <a:stretch>
-            <a:fillRect/>
-          </a:stretch>
-        </p:blipFill>
-        <p:spPr>
-          <a:xfrm>
-            <a:off x="12839215" y="7749540"/>
-            <a:ext cx="1722605" cy="411480"/>
-          </a:xfrm>
-          <a:prstGeom prst="rect">
-            <a:avLst/>
-          </a:prstGeom>
-        </p:spPr>
-      </p:pic>
     </p:spTree>
   </p:cSld>
   <p:clrMapOvr>
@@ -2000,32 +1818,6 @@
           </a:solidFill>
         </p:spPr>
       </p:sp>
-      <p:pic>
-        <p:nvPicPr>
-          <p:cNvPr id="4" name="Image 0" descr="preencoded.png">
-            <a:hlinkClick r:id="rId2"/>
-          </p:cNvPr>
-          <p:cNvPicPr>
-            <a:picLocks noChangeAspect="1"/>
-          </p:cNvPicPr>
-          <p:nvPr/>
-        </p:nvPicPr>
-        <p:blipFill>
-          <a:blip r:embed="rId3"/>
-          <a:stretch>
-            <a:fillRect/>
-          </a:stretch>
-        </p:blipFill>
-        <p:spPr>
-          <a:xfrm>
-            <a:off x="12839215" y="7749540"/>
-            <a:ext cx="1722605" cy="411480"/>
-          </a:xfrm>
-          <a:prstGeom prst="rect">
-            <a:avLst/>
-          </a:prstGeom>
-        </p:spPr>
-      </p:pic>
     </p:spTree>
   </p:cSld>
   <p:clrMapOvr>
@@ -2089,32 +1881,6 @@
           </a:solidFill>
         </p:spPr>
       </p:sp>
-      <p:pic>
-        <p:nvPicPr>
-          <p:cNvPr id="4" name="Image 0" descr="preencoded.png">
-            <a:hlinkClick r:id="rId2"/>
-          </p:cNvPr>
-          <p:cNvPicPr>
-            <a:picLocks noChangeAspect="1"/>
-          </p:cNvPicPr>
-          <p:nvPr/>
-        </p:nvPicPr>
-        <p:blipFill>
-          <a:blip r:embed="rId3"/>
-          <a:stretch>
-            <a:fillRect/>
-          </a:stretch>
-        </p:blipFill>
-        <p:spPr>
-          <a:xfrm>
-            <a:off x="12839215" y="7749540"/>
-            <a:ext cx="1722605" cy="411480"/>
-          </a:xfrm>
-          <a:prstGeom prst="rect">
-            <a:avLst/>
-          </a:prstGeom>
-        </p:spPr>
-      </p:pic>
     </p:spTree>
   </p:cSld>
   <p:clrMapOvr>
@@ -2178,32 +1944,6 @@
           </a:solidFill>
         </p:spPr>
       </p:sp>
-      <p:pic>
-        <p:nvPicPr>
-          <p:cNvPr id="4" name="Image 0" descr="preencoded.png">
-            <a:hlinkClick r:id="rId2"/>
-          </p:cNvPr>
-          <p:cNvPicPr>
-            <a:picLocks noChangeAspect="1"/>
-          </p:cNvPicPr>
-          <p:nvPr/>
-        </p:nvPicPr>
-        <p:blipFill>
-          <a:blip r:embed="rId3"/>
-          <a:stretch>
-            <a:fillRect/>
-          </a:stretch>
-        </p:blipFill>
-        <p:spPr>
-          <a:xfrm>
-            <a:off x="12839215" y="7749540"/>
-            <a:ext cx="1722605" cy="411480"/>
-          </a:xfrm>
-          <a:prstGeom prst="rect">
-            <a:avLst/>
-          </a:prstGeom>
-        </p:spPr>
-      </p:pic>
     </p:spTree>
   </p:cSld>
   <p:clrMapOvr>
